--- a/contents/Module-04-Tables-and-Data-Management.pptx
+++ b/contents/Module-04-Tables-and-Data-Management.pptx
@@ -8177,7 +8177,7 @@
         </p:nvSpPr>
         <p:spPr>
           <a:xfrm>
-            <a:off x="640080" y="3310128"/>
+            <a:off x="640080" y="3264408"/>
             <a:ext cx="292608" cy="292608"/>
           </a:xfrm>
           <a:prstGeom prst="rect">
@@ -8220,7 +8220,7 @@
         </p:nvSpPr>
         <p:spPr>
           <a:xfrm>
-            <a:off x="640080" y="3328416"/>
+            <a:off x="640080" y="3282696"/>
             <a:ext cx="292608" cy="256032"/>
           </a:xfrm>
           <a:prstGeom prst="rect">
@@ -8255,7 +8255,7 @@
         </p:nvSpPr>
         <p:spPr>
           <a:xfrm>
-            <a:off x="1051560" y="3291840"/>
+            <a:off x="1051560" y="3246120"/>
             <a:ext cx="6217920" cy="329184"/>
           </a:xfrm>
           <a:prstGeom prst="rect">
@@ -8290,7 +8290,7 @@
         </p:nvSpPr>
         <p:spPr>
           <a:xfrm>
-            <a:off x="640080" y="3767328"/>
+            <a:off x="640080" y="3675888"/>
             <a:ext cx="292608" cy="292608"/>
           </a:xfrm>
           <a:prstGeom prst="rect">
@@ -8333,7 +8333,7 @@
         </p:nvSpPr>
         <p:spPr>
           <a:xfrm>
-            <a:off x="640080" y="3785616"/>
+            <a:off x="640080" y="3694176"/>
             <a:ext cx="292608" cy="256032"/>
           </a:xfrm>
           <a:prstGeom prst="rect">
@@ -8368,7 +8368,7 @@
         </p:nvSpPr>
         <p:spPr>
           <a:xfrm>
-            <a:off x="1051560" y="3749040"/>
+            <a:off x="1051560" y="3657600"/>
             <a:ext cx="6217920" cy="329184"/>
           </a:xfrm>
           <a:prstGeom prst="rect">
@@ -8403,7 +8403,7 @@
         </p:nvSpPr>
         <p:spPr>
           <a:xfrm>
-            <a:off x="640080" y="4224528"/>
+            <a:off x="640080" y="4087368"/>
             <a:ext cx="292608" cy="292608"/>
           </a:xfrm>
           <a:prstGeom prst="rect">
@@ -8446,7 +8446,7 @@
         </p:nvSpPr>
         <p:spPr>
           <a:xfrm>
-            <a:off x="640080" y="4242816"/>
+            <a:off x="640080" y="4105656"/>
             <a:ext cx="292608" cy="256032"/>
           </a:xfrm>
           <a:prstGeom prst="rect">
@@ -8481,7 +8481,7 @@
         </p:nvSpPr>
         <p:spPr>
           <a:xfrm>
-            <a:off x="1051560" y="4206240"/>
+            <a:off x="1051560" y="4069080"/>
             <a:ext cx="6217920" cy="329184"/>
           </a:xfrm>
           <a:prstGeom prst="rect">
@@ -8516,7 +8516,7 @@
         </p:nvSpPr>
         <p:spPr>
           <a:xfrm>
-            <a:off x="640080" y="4681728"/>
+            <a:off x="640080" y="4498848"/>
             <a:ext cx="292608" cy="292608"/>
           </a:xfrm>
           <a:prstGeom prst="rect">
@@ -8559,7 +8559,7 @@
         </p:nvSpPr>
         <p:spPr>
           <a:xfrm>
-            <a:off x="640080" y="4700016"/>
+            <a:off x="640080" y="4517136"/>
             <a:ext cx="292608" cy="256032"/>
           </a:xfrm>
           <a:prstGeom prst="rect">
@@ -8594,7 +8594,7 @@
         </p:nvSpPr>
         <p:spPr>
           <a:xfrm>
-            <a:off x="1051560" y="4663440"/>
+            <a:off x="1051560" y="4480560"/>
             <a:ext cx="6217920" cy="329184"/>
           </a:xfrm>
           <a:prstGeom prst="rect">
@@ -8629,7 +8629,7 @@
         </p:nvSpPr>
         <p:spPr>
           <a:xfrm>
-            <a:off x="640080" y="5138928"/>
+            <a:off x="640080" y="4910328"/>
             <a:ext cx="292608" cy="292608"/>
           </a:xfrm>
           <a:prstGeom prst="rect">
@@ -8672,7 +8672,7 @@
         </p:nvSpPr>
         <p:spPr>
           <a:xfrm>
-            <a:off x="640080" y="5157216"/>
+            <a:off x="640080" y="4928616"/>
             <a:ext cx="292608" cy="256032"/>
           </a:xfrm>
           <a:prstGeom prst="rect">
@@ -8707,7 +8707,7 @@
         </p:nvSpPr>
         <p:spPr>
           <a:xfrm>
-            <a:off x="1051560" y="5120640"/>
+            <a:off x="1051560" y="4892040"/>
             <a:ext cx="6217920" cy="329184"/>
           </a:xfrm>
           <a:prstGeom prst="rect">
@@ -8742,7 +8742,7 @@
         </p:nvSpPr>
         <p:spPr>
           <a:xfrm>
-            <a:off x="640080" y="5596128"/>
+            <a:off x="640080" y="5321808"/>
             <a:ext cx="292608" cy="292608"/>
           </a:xfrm>
           <a:prstGeom prst="rect">
@@ -8785,7 +8785,7 @@
         </p:nvSpPr>
         <p:spPr>
           <a:xfrm>
-            <a:off x="640080" y="5614416"/>
+            <a:off x="640080" y="5340096"/>
             <a:ext cx="292608" cy="256032"/>
           </a:xfrm>
           <a:prstGeom prst="rect">
@@ -8820,7 +8820,7 @@
         </p:nvSpPr>
         <p:spPr>
           <a:xfrm>
-            <a:off x="1051560" y="5577840"/>
+            <a:off x="1051560" y="5303520"/>
             <a:ext cx="6217920" cy="329184"/>
           </a:xfrm>
           <a:prstGeom prst="rect">
@@ -8855,7 +8855,7 @@
         </p:nvSpPr>
         <p:spPr>
           <a:xfrm>
-            <a:off x="640080" y="6053328"/>
+            <a:off x="640080" y="5733288"/>
             <a:ext cx="292608" cy="292608"/>
           </a:xfrm>
           <a:prstGeom prst="rect">
@@ -8898,7 +8898,7 @@
         </p:nvSpPr>
         <p:spPr>
           <a:xfrm>
-            <a:off x="640080" y="6071616"/>
+            <a:off x="640080" y="5751576"/>
             <a:ext cx="292608" cy="256032"/>
           </a:xfrm>
           <a:prstGeom prst="rect">
@@ -8933,7 +8933,7 @@
         </p:nvSpPr>
         <p:spPr>
           <a:xfrm>
-            <a:off x="1051560" y="6035040"/>
+            <a:off x="1051560" y="5715000"/>
             <a:ext cx="6217920" cy="329184"/>
           </a:xfrm>
           <a:prstGeom prst="rect">
